--- a/docs/Roadshow-Deck-BidPilot.pptx
+++ b/docs/Roadshow-Deck-BidPilot.pptx
@@ -2056,7 +2056,7 @@
         <p:spPr>
           <a:xfrm>
             <a:off x="548640" y="4709160"/>
-            <a:ext cx="1828800" cy="457200"/>
+            <a:ext cx="2084832" cy="457200"/>
           </a:xfrm>
           <a:prstGeom prst="roundRect">
             <a:avLst>
@@ -2083,7 +2083,7 @@
         <p:spPr>
           <a:xfrm>
             <a:off x="548640" y="4709160"/>
-            <a:ext cx="1828800" cy="457200"/>
+            <a:ext cx="2084832" cy="457200"/>
           </a:xfrm>
           <a:prstGeom prst="rect">
             <a:avLst/>
@@ -2121,8 +2121,8 @@
         </p:nvSpPr>
         <p:spPr>
           <a:xfrm>
-            <a:off x="2578608" y="4709160"/>
-            <a:ext cx="1828800" cy="457200"/>
+            <a:off x="2862072" y="4709160"/>
+            <a:ext cx="2084832" cy="457200"/>
           </a:xfrm>
           <a:prstGeom prst="roundRect">
             <a:avLst>
@@ -2148,8 +2148,8 @@
         </p:nvSpPr>
         <p:spPr>
           <a:xfrm>
-            <a:off x="2578608" y="4709160"/>
-            <a:ext cx="1828800" cy="457200"/>
+            <a:off x="2862072" y="4709160"/>
+            <a:ext cx="2084832" cy="457200"/>
           </a:xfrm>
           <a:prstGeom prst="rect">
             <a:avLst/>
@@ -2187,8 +2187,8 @@
         </p:nvSpPr>
         <p:spPr>
           <a:xfrm>
-            <a:off x="4608576" y="4709160"/>
-            <a:ext cx="1828800" cy="457200"/>
+            <a:off x="5175504" y="4709160"/>
+            <a:ext cx="2084832" cy="457200"/>
           </a:xfrm>
           <a:prstGeom prst="roundRect">
             <a:avLst>
@@ -2214,8 +2214,8 @@
         </p:nvSpPr>
         <p:spPr>
           <a:xfrm>
-            <a:off x="4608576" y="4709160"/>
-            <a:ext cx="1828800" cy="457200"/>
+            <a:off x="5175504" y="4709160"/>
+            <a:ext cx="2084832" cy="457200"/>
           </a:xfrm>
           <a:prstGeom prst="rect">
             <a:avLst/>
@@ -2239,7 +2239,7 @@
                 <a:ea typeface="Microsoft YaHei" pitchFamily="34" charset="-122"/>
                 <a:cs typeface="Microsoft YaHei" pitchFamily="34" charset="-120"/>
               </a:rPr>
-              <a:t>98 项自动化测试</a:t>
+              <a:t>140 项测试</a:t>
             </a:r>
             <a:endParaRPr lang="en-US" sz="1300" dirty="0"/>
           </a:p>
@@ -2253,8 +2253,8 @@
         </p:nvSpPr>
         <p:spPr>
           <a:xfrm>
-            <a:off x="6638544" y="4709160"/>
-            <a:ext cx="1828800" cy="457200"/>
+            <a:off x="7488936" y="4709160"/>
+            <a:ext cx="2084832" cy="457200"/>
           </a:xfrm>
           <a:prstGeom prst="roundRect">
             <a:avLst>
@@ -2280,8 +2280,8 @@
         </p:nvSpPr>
         <p:spPr>
           <a:xfrm>
-            <a:off x="6638544" y="4709160"/>
-            <a:ext cx="1828800" cy="457200"/>
+            <a:off x="7488936" y="4709160"/>
+            <a:ext cx="2084832" cy="457200"/>
           </a:xfrm>
           <a:prstGeom prst="rect">
             <a:avLst/>
@@ -2305,7 +2305,7 @@
                 <a:ea typeface="Microsoft YaHei" pitchFamily="34" charset="-122"/>
                 <a:cs typeface="Microsoft YaHei" pitchFamily="34" charset="-120"/>
               </a:rPr>
-              <a:t>32类参数 · 7大机型</a:t>
+              <a:t>32 类参数</a:t>
             </a:r>
             <a:endParaRPr lang="en-US" sz="1300" dirty="0"/>
           </a:p>
@@ -2319,8 +2319,8 @@
         </p:nvSpPr>
         <p:spPr>
           <a:xfrm>
-            <a:off x="8668512" y="4709160"/>
-            <a:ext cx="1828800" cy="457200"/>
+            <a:off x="9802368" y="4709160"/>
+            <a:ext cx="2084832" cy="457200"/>
           </a:xfrm>
           <a:prstGeom prst="roundRect">
             <a:avLst>
@@ -2346,8 +2346,8 @@
         </p:nvSpPr>
         <p:spPr>
           <a:xfrm>
-            <a:off x="8668512" y="4709160"/>
-            <a:ext cx="1828800" cy="457200"/>
+            <a:off x="9802368" y="4709160"/>
+            <a:ext cx="2084832" cy="457200"/>
           </a:xfrm>
           <a:prstGeom prst="rect">
             <a:avLst/>
@@ -2371,7 +2371,7 @@
                 <a:ea typeface="Microsoft YaHei" pitchFamily="34" charset="-122"/>
                 <a:cs typeface="Microsoft YaHei" pitchFamily="34" charset="-120"/>
               </a:rPr>
-              <a:t>v1.7</a:t>
+              <a:t>v2.1</a:t>
             </a:r>
             <a:endParaRPr lang="en-US" sz="1300" dirty="0"/>
           </a:p>
@@ -3481,7 +3481,7 @@
                 <a:ea typeface="Microsoft YaHei" pitchFamily="34" charset="-122"/>
                 <a:cs typeface="Microsoft YaHei" pitchFamily="34" charset="-120"/>
               </a:rPr>
-              <a:t>16类参数·上下限语义</a:t>
+              <a:t>32类参数·上下限语义</a:t>
             </a:r>
             <a:endParaRPr lang="en-US" sz="1250" dirty="0"/>
           </a:p>
@@ -4592,7 +4592,7 @@
                 <a:ea typeface="Microsoft YaHei" pitchFamily="34" charset="-122"/>
                 <a:cs typeface="Microsoft YaHei" pitchFamily="34" charset="-120"/>
               </a:rPr>
-              <a:t>两周交付传统团队一个月的活；80 项自动化测试 = 业务理解的固化，不写一行多余代码。</a:t>
+              <a:t>两周交付传统团队一个月的活；127 项自动化测试 + CI徽章 + 审计日志 = 严谨看得见。</a:t>
             </a:r>
             <a:endParaRPr lang="en-US" sz="1250" dirty="0"/>
           </a:p>
@@ -4740,7 +4740,7 @@
                 <a:ea typeface="Microsoft YaHei" pitchFamily="34" charset="-122"/>
                 <a:cs typeface="Microsoft YaHei" pitchFamily="34" charset="-120"/>
               </a:rPr>
-              <a:t>v1.0–v1.7 可运行产品：四大输出 / 32类参数7大机型 / ★▲双级风控 / 公告变更检测 / 自定义词库 / 115项测试</a:t>
+              <a:t>v1.0–v2.1 可运行产品：四大输出 / 32类参数7大机型 / ★▲风控 / 原文批注 / 置信度 / 审计日志 / 140项测试</a:t>
             </a:r>
             <a:endParaRPr lang="en-US" sz="1200" dirty="0"/>
           </a:p>
@@ -5202,7 +5202,7 @@
                 <a:ea typeface="Microsoft YaHei" pitchFamily="34" charset="-122"/>
                 <a:cs typeface="Microsoft YaHei" pitchFamily="34" charset="-120"/>
               </a:rPr>
-              <a:t>GitHub / 在线演示：参赛后补充链接 · 官方咨询：4001109999</a:t>
+              <a:t>在线演示：https://azzb66223944qq.github.io/bidpilot/ · 官方咨询：4001109999</a:t>
             </a:r>
             <a:endParaRPr lang="en-US" sz="1400" dirty="0"/>
           </a:p>
@@ -5779,7 +5779,7 @@
                 <a:ea typeface="Microsoft YaHei" pitchFamily="34" charset="-122"/>
                 <a:cs typeface="Microsoft YaHei" pitchFamily="34" charset="-120"/>
               </a:rPr>
-              <a:t>16类技术参数、★关键条款、解密时限、保证金账户规则——漏一条即出局</a:t>
+              <a:t>32类参数、★▲条款、解密时限、保证金规则——漏一条即出局</a:t>
             </a:r>
             <a:endParaRPr lang="en-US" sz="1300" dirty="0"/>
           </a:p>
@@ -6314,7 +6314,7 @@
         <p:spPr>
           <a:xfrm>
             <a:off x="548640" y="1554480"/>
-            <a:ext cx="4206240" cy="822960"/>
+            <a:ext cx="4434840" cy="822960"/>
           </a:xfrm>
           <a:prstGeom prst="rect">
             <a:avLst/>
@@ -6827,7 +6827,7 @@
                 <a:ea typeface="Microsoft YaHei" pitchFamily="34" charset="-122"/>
                 <a:cs typeface="Microsoft YaHei" pitchFamily="34" charset="-120"/>
               </a:rPr>
-              <a:t>16类参数提取 · 单位自动换算 · ★关键参数段级定位 · 元信息提取</a:t>
+              <a:t>32类参数 · 单位换算 · ★▲条款定位 · 变更检测</a:t>
             </a:r>
             <a:endParaRPr lang="en-US" sz="1250" dirty="0"/>
           </a:p>
@@ -7083,7 +7083,7 @@
                 <a:ea typeface="Microsoft YaHei" pitchFamily="34" charset="-122"/>
                 <a:cs typeface="Microsoft YaHei" pitchFamily="34" charset="-120"/>
               </a:rPr>
-              <a:t>报告导出（MD/HTML/PDF）· 一键补料清单 · 公告变更对比（澄清/补遗diff）</a:t>
+              <a:t>MD/HTML/PDF报告 · 补料清单 · 公告对比</a:t>
             </a:r>
             <a:endParaRPr lang="en-US" sz="1250" dirty="0"/>
           </a:p>
@@ -7321,7 +7321,7 @@
                 <a:ea typeface="Microsoft YaHei" pitchFamily="34" charset="-122"/>
                 <a:cs typeface="Microsoft YaHei" pitchFamily="34" charset="-120"/>
               </a:rPr>
-              <a:t>资格自查页（v1.4 实拍）</a:t>
+              <a:t>资格自查页 · 产品实拍（演示数据为虚构）</a:t>
             </a:r>
             <a:endParaRPr lang="en-US" sz="1100" dirty="0"/>
           </a:p>
@@ -8107,7 +8107,7 @@
                 <a:ea typeface="Microsoft YaHei" pitchFamily="34" charset="-122"/>
                 <a:cs typeface="Microsoft YaHei" pitchFamily="34" charset="-120"/>
               </a:rPr>
-              <a:t>16类参数 · 80项测试</a:t>
+              <a:t>32类参数 · 140项测试 · 审计日志</a:t>
             </a:r>
             <a:endParaRPr lang="en-US" sz="1250" dirty="0"/>
           </a:p>
@@ -8732,7 +8732,7 @@
                 <a:ea typeface="Microsoft YaHei" pitchFamily="34" charset="-122"/>
                 <a:cs typeface="Microsoft YaHei" pitchFamily="34" charset="-120"/>
               </a:rPr>
-              <a:t>16 类参数 · 可解释判定</a:t>
+              <a:t>32 类参数 · 7 大机型族 · 可解释判定</a:t>
             </a:r>
             <a:endParaRPr lang="en-US" sz="3000" dirty="0"/>
           </a:p>
@@ -8837,7 +8837,7 @@
                 <a:ea typeface="Microsoft YaHei" pitchFamily="34" charset="-122"/>
                 <a:cs typeface="Microsoft YaHei" pitchFamily="34" charset="-120"/>
               </a:rPr>
-              <a:t>16</a:t>
+              <a:t>32</a:t>
             </a:r>
             <a:endParaRPr lang="en-US" sz="4000" dirty="0"/>
           </a:p>
@@ -8915,7 +8915,7 @@
                 <a:ea typeface="Microsoft YaHei" pitchFamily="34" charset="-122"/>
                 <a:cs typeface="Microsoft YaHei" pitchFamily="34" charset="-120"/>
               </a:rPr>
-              <a:t>装载/挖掘/起重/泵送</a:t>
+              <a:t>装载/挖掘/起重/泵送/道路/环卫</a:t>
             </a:r>
             <a:endParaRPr lang="en-US" sz="1050" dirty="0"/>
           </a:p>
@@ -8932,7 +8932,7 @@
                 <a:ea typeface="Microsoft YaHei" pitchFamily="34" charset="-122"/>
                 <a:cs typeface="Microsoft YaHei" pitchFamily="34" charset="-120"/>
               </a:rPr>
-              <a:t>四大机型族全覆盖</a:t>
+              <a:t>七大机型族全覆盖</a:t>
             </a:r>
             <a:endParaRPr lang="en-US" sz="1050" dirty="0"/>
           </a:p>
@@ -8998,7 +8998,7 @@
                 <a:ea typeface="Microsoft YaHei" pitchFamily="34" charset="-122"/>
                 <a:cs typeface="Microsoft YaHei" pitchFamily="34" charset="-120"/>
               </a:rPr>
-              <a:t>3 套</a:t>
+              <a:t>4 套</a:t>
             </a:r>
             <a:endParaRPr lang="en-US" sz="4000" dirty="0"/>
           </a:p>
@@ -9076,7 +9076,7 @@
                 <a:ea typeface="Microsoft YaHei" pitchFamily="34" charset="-122"/>
                 <a:cs typeface="Microsoft YaHei" pitchFamily="34" charset="-120"/>
               </a:rPr>
-              <a:t>mm↔m · 马力↔kW · 吨↔kg</a:t>
+              <a:t>mm↔m · 马力↔kW · 吨↔kg · L↔m³</a:t>
             </a:r>
             <a:endParaRPr lang="en-US" sz="1050" dirty="0"/>
           </a:p>
@@ -9159,7 +9159,7 @@
                 <a:ea typeface="Microsoft YaHei" pitchFamily="34" charset="-122"/>
                 <a:cs typeface="Microsoft YaHei" pitchFamily="34" charset="-120"/>
               </a:rPr>
-              <a:t>★</a:t>
+              <a:t>★▲</a:t>
             </a:r>
             <a:endParaRPr lang="en-US" sz="4000" dirty="0"/>
           </a:p>
@@ -9198,7 +9198,7 @@
                 <a:ea typeface="Microsoft YaHei" pitchFamily="34" charset="-122"/>
                 <a:cs typeface="Microsoft YaHei" pitchFamily="34" charset="-120"/>
               </a:rPr>
-              <a:t>关键参数段级定位</a:t>
+              <a:t>双级条款风控</a:t>
             </a:r>
             <a:endParaRPr lang="en-US" sz="1350" dirty="0"/>
           </a:p>
@@ -9237,7 +9237,7 @@
                 <a:ea typeface="Microsoft YaHei" pitchFamily="34" charset="-122"/>
                 <a:cs typeface="Microsoft YaHei" pitchFamily="34" charset="-120"/>
               </a:rPr>
-              <a:t>★参数负偏离 → 直接废标级</a:t>
+              <a:t>★负偏离→废标级 · ▲负偏离→评分复核</a:t>
             </a:r>
             <a:endParaRPr lang="en-US" sz="1050" dirty="0"/>
           </a:p>
@@ -9254,7 +9254,7 @@
                 <a:ea typeface="Microsoft YaHei" pitchFamily="34" charset="-122"/>
                 <a:cs typeface="Microsoft YaHei" pitchFamily="34" charset="-120"/>
               </a:rPr>
-              <a:t>红色警告 + 评分压制</a:t>
+              <a:t>原文批注视图：风险在原文上发光</a:t>
             </a:r>
             <a:endParaRPr lang="en-US" sz="1050" dirty="0"/>
           </a:p>
@@ -9481,7 +9481,7 @@
                 <a:ea typeface="Microsoft YaHei" pitchFamily="34" charset="-122"/>
                 <a:cs typeface="Microsoft YaHei" pitchFamily="34" charset="-120"/>
               </a:rPr>
-              <a:t>115 项自动化测试全绿 · 32类参数 · 7大机型族 · 正例可投/反例敢拒</a:t>
+              <a:t>133 项自动化测试全绿：正例可投 · 反例敢拒 · 乱输入不崩</a:t>
             </a:r>
             <a:endParaRPr lang="en-US" sz="1400" dirty="0"/>
           </a:p>
@@ -9570,7 +9570,7 @@
                 <a:ea typeface="Microsoft YaHei" pitchFamily="34" charset="-122"/>
                 <a:cs typeface="Microsoft YaHei" pitchFamily="34" charset="-120"/>
               </a:rPr>
-              <a:t>偏离表实拍：★仅标记关键参数 · 6.58m 自动对比 ≥6500mm</a:t>
+              <a:t>偏离表实拍：★精准定位 · 6.58m 自动对比 ≥6500mm</a:t>
             </a:r>
             <a:endParaRPr lang="en-US" sz="1150" dirty="0"/>
           </a:p>
@@ -11214,7 +11214,7 @@
                 <a:ea typeface="Microsoft YaHei" pitchFamily="34" charset="-122"/>
                 <a:cs typeface="Microsoft YaHei" pitchFamily="34" charset="-120"/>
               </a:rPr>
-              <a:t>扩品路径：装载/挖掘/起重/泵送四类机型已覆盖，规则库横向复制成本低</a:t>
+              <a:t>扩品路径：七大机型族已覆盖，规则库横向复制成本低</a:t>
             </a:r>
             <a:endParaRPr lang="en-US" sz="1300" dirty="0"/>
           </a:p>

--- a/docs/Roadshow-Deck-BidPilot.pptx
+++ b/docs/Roadshow-Deck-BidPilot.pptx
@@ -4592,7 +4592,7 @@
                 <a:ea typeface="Microsoft YaHei" pitchFamily="34" charset="-122"/>
                 <a:cs typeface="Microsoft YaHei" pitchFamily="34" charset="-120"/>
               </a:rPr>
-              <a:t>两周交付传统团队一个月的活；127 项自动化测试 + CI徽章 + 审计日志 = 严谨看得见。</a:t>
+              <a:t>两周交付传统团队一个月的活；140 项自动化测试 + CI徽章 + 审计日志 = 严谨看得见。</a:t>
             </a:r>
             <a:endParaRPr lang="en-US" sz="1250" dirty="0"/>
           </a:p>
@@ -4740,7 +4740,7 @@
                 <a:ea typeface="Microsoft YaHei" pitchFamily="34" charset="-122"/>
                 <a:cs typeface="Microsoft YaHei" pitchFamily="34" charset="-120"/>
               </a:rPr>
-              <a:t>v1.0–v2.1 可运行产品：四大输出 / 32类参数7大机型 / ★▲风控 / 原文批注 / 置信度 / 审计日志 / 140项测试</a:t>
+              <a:t>v1.0–v2.1.1 可运行产品：四大输出 / 32类参数7大机型 / ★▲风控 / 原文批注 / 置信度 / 审计日志 / 140项测试</a:t>
             </a:r>
             <a:endParaRPr lang="en-US" sz="1200" dirty="0"/>
           </a:p>
@@ -9481,7 +9481,7 @@
                 <a:ea typeface="Microsoft YaHei" pitchFamily="34" charset="-122"/>
                 <a:cs typeface="Microsoft YaHei" pitchFamily="34" charset="-120"/>
               </a:rPr>
-              <a:t>133 项自动化测试全绿：正例可投 · 反例敢拒 · 乱输入不崩</a:t>
+              <a:t>140 项自动化测试全绿：正例可投 · 反例敢拒 · 乱输入不崩</a:t>
             </a:r>
             <a:endParaRPr lang="en-US" sz="1400" dirty="0"/>
           </a:p>

--- a/docs/Roadshow-Deck-BidPilot.pptx
+++ b/docs/Roadshow-Deck-BidPilot.pptx
@@ -2239,7 +2239,7 @@
                 <a:ea typeface="Microsoft YaHei" pitchFamily="34" charset="-122"/>
                 <a:cs typeface="Microsoft YaHei" pitchFamily="34" charset="-120"/>
               </a:rPr>
-              <a:t>140 项测试</a:t>
+              <a:t>142 项测试</a:t>
             </a:r>
             <a:endParaRPr lang="en-US" sz="1300" dirty="0"/>
           </a:p>
@@ -4592,7 +4592,7 @@
                 <a:ea typeface="Microsoft YaHei" pitchFamily="34" charset="-122"/>
                 <a:cs typeface="Microsoft YaHei" pitchFamily="34" charset="-120"/>
               </a:rPr>
-              <a:t>两周交付传统团队一个月的活；140 项自动化测试 + CI徽章 + 审计日志 = 严谨看得见。</a:t>
+              <a:t>两周交付传统团队一个月的活；142 项自动化测试 + CI徽章 + 审计日志 = 严谨看得见。</a:t>
             </a:r>
             <a:endParaRPr lang="en-US" sz="1250" dirty="0"/>
           </a:p>
@@ -4740,7 +4740,7 @@
                 <a:ea typeface="Microsoft YaHei" pitchFamily="34" charset="-122"/>
                 <a:cs typeface="Microsoft YaHei" pitchFamily="34" charset="-120"/>
               </a:rPr>
-              <a:t>v1.0–v2.1.1 可运行产品：四大输出 / 32类参数7大机型 / ★▲风控 / 原文批注 / 置信度 / 审计日志 / 140项测试</a:t>
+              <a:t>v1.0–v2.1.1 可运行产品：四大输出 / 32类参数7大机型 / ★▲风控 / 原文批注 / 置信度 / 审计日志 / 142项测试</a:t>
             </a:r>
             <a:endParaRPr lang="en-US" sz="1200" dirty="0"/>
           </a:p>
@@ -8107,7 +8107,7 @@
                 <a:ea typeface="Microsoft YaHei" pitchFamily="34" charset="-122"/>
                 <a:cs typeface="Microsoft YaHei" pitchFamily="34" charset="-120"/>
               </a:rPr>
-              <a:t>32类参数 · 140项测试 · 审计日志</a:t>
+              <a:t>32类参数 · 142项测试 · 审计日志</a:t>
             </a:r>
             <a:endParaRPr lang="en-US" sz="1250" dirty="0"/>
           </a:p>
@@ -9481,7 +9481,7 @@
                 <a:ea typeface="Microsoft YaHei" pitchFamily="34" charset="-122"/>
                 <a:cs typeface="Microsoft YaHei" pitchFamily="34" charset="-120"/>
               </a:rPr>
-              <a:t>140 项自动化测试全绿：正例可投 · 反例敢拒 · 乱输入不崩</a:t>
+              <a:t>142 项自动化测试全绿：正例可投 · 反例敢拒 · 乱输入不崩</a:t>
             </a:r>
             <a:endParaRPr lang="en-US" sz="1400" dirty="0"/>
           </a:p>

--- a/docs/Roadshow-Deck-BidPilot.pptx
+++ b/docs/Roadshow-Deck-BidPilot.pptx
@@ -2239,7 +2239,7 @@
                 <a:ea typeface="Microsoft YaHei" pitchFamily="34" charset="-122"/>
                 <a:cs typeface="Microsoft YaHei" pitchFamily="34" charset="-120"/>
               </a:rPr>
-              <a:t>142 项测试</a:t>
+              <a:t>167 项测试</a:t>
             </a:r>
             <a:endParaRPr lang="en-US" sz="1300" dirty="0"/>
           </a:p>
@@ -2371,7 +2371,7 @@
                 <a:ea typeface="Microsoft YaHei" pitchFamily="34" charset="-122"/>
                 <a:cs typeface="Microsoft YaHei" pitchFamily="34" charset="-120"/>
               </a:rPr>
-              <a:t>v2.1</a:t>
+              <a:t>v3.0</a:t>
             </a:r>
             <a:endParaRPr lang="en-US" sz="1300" dirty="0"/>
           </a:p>
@@ -4592,7 +4592,7 @@
                 <a:ea typeface="Microsoft YaHei" pitchFamily="34" charset="-122"/>
                 <a:cs typeface="Microsoft YaHei" pitchFamily="34" charset="-120"/>
               </a:rPr>
-              <a:t>两周交付传统团队一个月的活；142 项自动化测试 + CI徽章 + 审计日志 = 严谨看得见。</a:t>
+              <a:t>两周交付传统团队一个月的活；167 项自动化测试 + CI徽章 + 审计日志 = 严谨看得见。</a:t>
             </a:r>
             <a:endParaRPr lang="en-US" sz="1250" dirty="0"/>
           </a:p>
@@ -4740,7 +4740,7 @@
                 <a:ea typeface="Microsoft YaHei" pitchFamily="34" charset="-122"/>
                 <a:cs typeface="Microsoft YaHei" pitchFamily="34" charset="-120"/>
               </a:rPr>
-              <a:t>v1.0–v2.1.1 可运行产品：四大输出 / 32类参数7大机型 / ★▲风控 / 原文批注 / 置信度 / 审计日志 / 142项测试</a:t>
+              <a:t>v1.0–v3.0 可运行产品：四大输出 / 32类参数 / ★▲风控 / 判例风控 / 商机雷达 / 审计日志 / 167项测试</a:t>
             </a:r>
             <a:endParaRPr lang="en-US" sz="1200" dirty="0"/>
           </a:p>
@@ -8107,7 +8107,7 @@
                 <a:ea typeface="Microsoft YaHei" pitchFamily="34" charset="-122"/>
                 <a:cs typeface="Microsoft YaHei" pitchFamily="34" charset="-120"/>
               </a:rPr>
-              <a:t>32类参数 · 142项测试 · 审计日志</a:t>
+              <a:t>32类参数 · 167项测试 · 判例引用</a:t>
             </a:r>
             <a:endParaRPr lang="en-US" sz="1250" dirty="0"/>
           </a:p>
@@ -9481,7 +9481,7 @@
                 <a:ea typeface="Microsoft YaHei" pitchFamily="34" charset="-122"/>
                 <a:cs typeface="Microsoft YaHei" pitchFamily="34" charset="-120"/>
               </a:rPr>
-              <a:t>142 项自动化测试全绿：正例可投 · 反例敢拒 · 乱输入不崩</a:t>
+              <a:t>167 项自动化测试全绿：正例可投 · 反例敢拒 · 乱输入不崩</a:t>
             </a:r>
             <a:endParaRPr lang="en-US" sz="1400" dirty="0"/>
           </a:p>
